--- a/ゲーム科1年/00_前期/ゲームプログラミングⅢ/ゲーム数学/座学/06_放物線.pptx
+++ b/ゲーム科1年/00_前期/ゲームプログラミングⅢ/ゲーム数学/座学/06_放物線.pptx
@@ -263,7 +263,7 @@
           <a:p>
             <a:fld id="{E9CC885B-4903-4D54-9A93-00025F12DED9}" type="datetimeFigureOut">
               <a:rPr kumimoji="1" lang="ja-JP" altLang="en-US" smtClean="0"/>
-              <a:t>2024/11/7</a:t>
+              <a:t>2025/6/19</a:t>
             </a:fld>
             <a:endParaRPr kumimoji="1" lang="ja-JP" altLang="en-US"/>
           </a:p>
@@ -493,7 +493,7 @@
           <a:p>
             <a:fld id="{E9CC885B-4903-4D54-9A93-00025F12DED9}" type="datetimeFigureOut">
               <a:rPr kumimoji="1" lang="ja-JP" altLang="en-US" smtClean="0"/>
-              <a:t>2024/11/7</a:t>
+              <a:t>2025/6/19</a:t>
             </a:fld>
             <a:endParaRPr kumimoji="1" lang="ja-JP" altLang="en-US"/>
           </a:p>
@@ -733,7 +733,7 @@
           <a:p>
             <a:fld id="{E9CC885B-4903-4D54-9A93-00025F12DED9}" type="datetimeFigureOut">
               <a:rPr kumimoji="1" lang="ja-JP" altLang="en-US" smtClean="0"/>
-              <a:t>2024/11/7</a:t>
+              <a:t>2025/6/19</a:t>
             </a:fld>
             <a:endParaRPr kumimoji="1" lang="ja-JP" altLang="en-US"/>
           </a:p>
@@ -963,7 +963,7 @@
           <a:p>
             <a:fld id="{E9CC885B-4903-4D54-9A93-00025F12DED9}" type="datetimeFigureOut">
               <a:rPr kumimoji="1" lang="ja-JP" altLang="en-US" smtClean="0"/>
-              <a:t>2024/11/7</a:t>
+              <a:t>2025/6/19</a:t>
             </a:fld>
             <a:endParaRPr kumimoji="1" lang="ja-JP" altLang="en-US"/>
           </a:p>
@@ -1238,7 +1238,7 @@
           <a:p>
             <a:fld id="{E9CC885B-4903-4D54-9A93-00025F12DED9}" type="datetimeFigureOut">
               <a:rPr kumimoji="1" lang="ja-JP" altLang="en-US" smtClean="0"/>
-              <a:t>2024/11/7</a:t>
+              <a:t>2025/6/19</a:t>
             </a:fld>
             <a:endParaRPr kumimoji="1" lang="ja-JP" altLang="en-US"/>
           </a:p>
@@ -1567,7 +1567,7 @@
           <a:p>
             <a:fld id="{E9CC885B-4903-4D54-9A93-00025F12DED9}" type="datetimeFigureOut">
               <a:rPr kumimoji="1" lang="ja-JP" altLang="en-US" smtClean="0"/>
-              <a:t>2024/11/7</a:t>
+              <a:t>2025/6/19</a:t>
             </a:fld>
             <a:endParaRPr kumimoji="1" lang="ja-JP" altLang="en-US"/>
           </a:p>
@@ -2043,7 +2043,7 @@
           <a:p>
             <a:fld id="{E9CC885B-4903-4D54-9A93-00025F12DED9}" type="datetimeFigureOut">
               <a:rPr kumimoji="1" lang="ja-JP" altLang="en-US" smtClean="0"/>
-              <a:t>2024/11/7</a:t>
+              <a:t>2025/6/19</a:t>
             </a:fld>
             <a:endParaRPr kumimoji="1" lang="ja-JP" altLang="en-US"/>
           </a:p>
@@ -2184,7 +2184,7 @@
           <a:p>
             <a:fld id="{E9CC885B-4903-4D54-9A93-00025F12DED9}" type="datetimeFigureOut">
               <a:rPr kumimoji="1" lang="ja-JP" altLang="en-US" smtClean="0"/>
-              <a:t>2024/11/7</a:t>
+              <a:t>2025/6/19</a:t>
             </a:fld>
             <a:endParaRPr kumimoji="1" lang="ja-JP" altLang="en-US"/>
           </a:p>
@@ -2297,7 +2297,7 @@
           <a:p>
             <a:fld id="{E9CC885B-4903-4D54-9A93-00025F12DED9}" type="datetimeFigureOut">
               <a:rPr kumimoji="1" lang="ja-JP" altLang="en-US" smtClean="0"/>
-              <a:t>2024/11/7</a:t>
+              <a:t>2025/6/19</a:t>
             </a:fld>
             <a:endParaRPr kumimoji="1" lang="ja-JP" altLang="en-US"/>
           </a:p>
@@ -2640,7 +2640,7 @@
           <a:p>
             <a:fld id="{E9CC885B-4903-4D54-9A93-00025F12DED9}" type="datetimeFigureOut">
               <a:rPr kumimoji="1" lang="ja-JP" altLang="en-US" smtClean="0"/>
-              <a:t>2024/11/7</a:t>
+              <a:t>2025/6/19</a:t>
             </a:fld>
             <a:endParaRPr kumimoji="1" lang="ja-JP" altLang="en-US"/>
           </a:p>
@@ -2928,7 +2928,7 @@
           <a:p>
             <a:fld id="{E9CC885B-4903-4D54-9A93-00025F12DED9}" type="datetimeFigureOut">
               <a:rPr kumimoji="1" lang="ja-JP" altLang="en-US" smtClean="0"/>
-              <a:t>2024/11/7</a:t>
+              <a:t>2025/6/19</a:t>
             </a:fld>
             <a:endParaRPr kumimoji="1" lang="ja-JP" altLang="en-US"/>
           </a:p>
@@ -3201,7 +3201,7 @@
           <a:p>
             <a:fld id="{E9CC885B-4903-4D54-9A93-00025F12DED9}" type="datetimeFigureOut">
               <a:rPr kumimoji="1" lang="ja-JP" altLang="en-US" smtClean="0"/>
-              <a:t>2024/11/7</a:t>
+              <a:t>2025/6/19</a:t>
             </a:fld>
             <a:endParaRPr kumimoji="1" lang="ja-JP" altLang="en-US"/>
           </a:p>
@@ -3618,6 +3618,60 @@
           <a:chExt cx="0" cy="0"/>
         </a:xfrm>
       </p:grpSpPr>
+      <p:sp>
+        <p:nvSpPr>
+          <p:cNvPr id="2" name="四角形: 角を丸くする 1">
+            <a:extLst>
+              <a:ext uri="{FF2B5EF4-FFF2-40B4-BE49-F238E27FC236}">
+                <a16:creationId xmlns:a16="http://schemas.microsoft.com/office/drawing/2014/main" id="{4C983604-EB14-4CDF-BCAF-AC3C97E53081}"/>
+              </a:ext>
+            </a:extLst>
+          </p:cNvPr>
+          <p:cNvSpPr/>
+          <p:nvPr/>
+        </p:nvSpPr>
+        <p:spPr>
+          <a:xfrm>
+            <a:off x="386817" y="2107167"/>
+            <a:ext cx="9375249" cy="4335965"/>
+          </a:xfrm>
+          <a:prstGeom prst="roundRect">
+            <a:avLst/>
+          </a:prstGeom>
+          <a:solidFill>
+            <a:schemeClr val="bg1">
+              <a:lumMod val="85000"/>
+            </a:schemeClr>
+          </a:solidFill>
+          <a:ln>
+            <a:noFill/>
+          </a:ln>
+        </p:spPr>
+        <p:style>
+          <a:lnRef idx="2">
+            <a:schemeClr val="accent1">
+              <a:shade val="50000"/>
+            </a:schemeClr>
+          </a:lnRef>
+          <a:fillRef idx="1">
+            <a:schemeClr val="accent1"/>
+          </a:fillRef>
+          <a:effectRef idx="0">
+            <a:schemeClr val="accent1"/>
+          </a:effectRef>
+          <a:fontRef idx="minor">
+            <a:schemeClr val="lt1"/>
+          </a:fontRef>
+        </p:style>
+        <p:txBody>
+          <a:bodyPr rtlCol="0" anchor="ctr"/>
+          <a:lstStyle/>
+          <a:p>
+            <a:pPr algn="ctr"/>
+            <a:endParaRPr kumimoji="1" lang="ja-JP" altLang="en-US"/>
+          </a:p>
+        </p:txBody>
+      </p:sp>
       <p:sp>
         <p:nvSpPr>
           <p:cNvPr id="4" name="テキスト ボックス 3">
@@ -5011,8 +5065,8 @@
           </a:p>
         </p:txBody>
       </p:sp>
-      <mc:AlternateContent xmlns:mc="http://schemas.openxmlformats.org/markup-compatibility/2006" xmlns:a14="http://schemas.microsoft.com/office/drawing/2010/main">
-        <mc:Choice Requires="a14">
+      <mc:AlternateContent xmlns:mc="http://schemas.openxmlformats.org/markup-compatibility/2006">
+        <mc:Choice xmlns:a14="http://schemas.microsoft.com/office/drawing/2010/main" Requires="a14">
           <p:sp>
             <p:nvSpPr>
               <p:cNvPr id="6" name="テキスト ボックス 5">
@@ -5119,10 +5173,18 @@
               </a:p>
               <a:p>
                 <a:r>
-                  <a:rPr kumimoji="1" lang="ja-JP" altLang="en-US" sz="2400" dirty="0"/>
+                  <a:rPr kumimoji="1" lang="ja-JP" altLang="en-US" sz="2400" b="1" dirty="0">
+                    <a:solidFill>
+                      <a:srgbClr val="FF0000"/>
+                    </a:solidFill>
+                  </a:rPr>
                   <a:t>■解答</a:t>
                 </a:r>
-                <a:endParaRPr kumimoji="1" lang="en-US" altLang="ja-JP" sz="2400" dirty="0"/>
+                <a:endParaRPr kumimoji="1" lang="en-US" altLang="ja-JP" sz="2400" b="1" dirty="0">
+                  <a:solidFill>
+                    <a:srgbClr val="FF0000"/>
+                  </a:solidFill>
+                </a:endParaRPr>
               </a:p>
               <a:p>
                 <a14:m>
@@ -5420,7 +5482,7 @@
             </p:txBody>
           </p:sp>
         </mc:Choice>
-        <mc:Fallback xmlns="">
+        <mc:Fallback>
           <p:sp>
             <p:nvSpPr>
               <p:cNvPr id="6" name="テキスト ボックス 5">
@@ -5531,8 +5593,8 @@
           </a:p>
         </p:txBody>
       </p:sp>
-      <mc:AlternateContent xmlns:mc="http://schemas.openxmlformats.org/markup-compatibility/2006" xmlns:a14="http://schemas.microsoft.com/office/drawing/2010/main">
-        <mc:Choice Requires="a14">
+      <mc:AlternateContent xmlns:mc="http://schemas.openxmlformats.org/markup-compatibility/2006">
+        <mc:Choice xmlns:a14="http://schemas.microsoft.com/office/drawing/2010/main" Requires="a14">
           <p:sp>
             <p:nvSpPr>
               <p:cNvPr id="6" name="テキスト ボックス 5">
@@ -5627,10 +5689,18 @@
               </a:p>
               <a:p>
                 <a:r>
-                  <a:rPr kumimoji="1" lang="ja-JP" altLang="en-US" sz="2400" dirty="0"/>
+                  <a:rPr kumimoji="1" lang="ja-JP" altLang="en-US" sz="2400" b="1" dirty="0">
+                    <a:solidFill>
+                      <a:srgbClr val="FF0000"/>
+                    </a:solidFill>
+                  </a:rPr>
                   <a:t>■解答</a:t>
                 </a:r>
-                <a:endParaRPr kumimoji="1" lang="en-US" altLang="ja-JP" sz="2400" dirty="0"/>
+                <a:endParaRPr kumimoji="1" lang="en-US" altLang="ja-JP" sz="2400" b="1" dirty="0">
+                  <a:solidFill>
+                    <a:srgbClr val="FF0000"/>
+                  </a:solidFill>
+                </a:endParaRPr>
               </a:p>
               <a:p>
                 <a14:m>
@@ -5992,7 +6062,7 @@
             </p:txBody>
           </p:sp>
         </mc:Choice>
-        <mc:Fallback xmlns="">
+        <mc:Fallback>
           <p:sp>
             <p:nvSpPr>
               <p:cNvPr id="6" name="テキスト ボックス 5">
